--- a/presentation/Phoenix_X_SIH26169_Final.pptx
+++ b/presentation/Phoenix_X_SIH26169_Final.pptx
@@ -5671,15 +5671,14 @@
                 <a:spcPts val="0"/>
               </a:spcAft>
               <a:buNone/>
-            </a:pPr>
-            <a:r>
-              <a:rPr sz="1450" b="0" i="0" lang="en-US">
-                <a:solidFill>
-                  <a:srgbClr val="566074"/>
-                </a:solidFill>
-                <a:latin typeface="Calibri"/>
-              </a:rPr>
-              <a:t>AI-based virtual camera tracking system for coarse alignment of mobile Free-Space Optical Communication (FSOC) terminals</a:t>
+              <a:defRPr sz="1250" b="1">
+                <a:solidFill>
+                  <a:srgbClr val="0F2240"/>
+                </a:solidFill>
+              </a:defRPr>
+            </a:pPr>
+            <a:r>
+              <a:t>Software-in-the-Loop (SIL) Testbed for Coarse Tracking &amp; Reacquisition in Mobile FSOC Terminals</a:t>
             </a:r>
           </a:p>
         </p:txBody>
@@ -6515,10 +6514,14 @@
                 <a:spcPts val="0"/>
               </a:spcAft>
               <a:buNone/>
-            </a:pPr>
-            <a:r>
-              <a:rPr sz="1100"/>
-              <a:t>Closed-Loop SIL Lock in ≤ 0.8 s across 2000x2000 space</a:t>
+              <a:defRPr sz="1000" b="1">
+                <a:solidFill>
+                  <a:srgbClr val="212B36"/>
+                </a:solidFill>
+              </a:defRPr>
+            </a:pPr>
+            <a:r>
+              <a:t>Scale: 109.1 μrad/px (4°x3° FOV default) | Coarse Handover Boundary: ≤ 10 px (≈ 1.09 mrad)</a:t>
             </a:r>
           </a:p>
         </p:txBody>
@@ -6606,10 +6609,14 @@
                 <a:spcPts val="0"/>
               </a:spcAft>
               <a:buNone/>
-            </a:pPr>
-            <a:r>
-              <a:rPr sz="1100"/>
-              <a:t>Continuous 2D Gaussian Fit: Centroid RMSE &lt; 0.2 px (SLA: ≤ 10 px)</a:t>
+              <a:defRPr sz="1000" b="1">
+                <a:solidFill>
+                  <a:srgbClr val="212B36"/>
+                </a:solidFill>
+              </a:defRPr>
+            </a:pPr>
+            <a:r>
+              <a:t>Primary Innovation: Uncertainty-Guided Elliptical Reacquisition (up to 97% faster re-lock)</a:t>
             </a:r>
           </a:p>
         </p:txBody>
@@ -6697,10 +6704,14 @@
                 <a:spcPts val="0"/>
               </a:spcAft>
               <a:buNone/>
-            </a:pPr>
-            <a:r>
-              <a:rPr sz="1100"/>
-              <a:t>Dual-Mode IMM-Kalman Filter (Constant Velocity + Coordinated Turn)</a:t>
+              <a:defRPr sz="1000" b="1">
+                <a:solidFill>
+                  <a:srgbClr val="212B36"/>
+                </a:solidFill>
+              </a:defRPr>
+            </a:pPr>
+            <a:r>
+              <a:t>Secondary Innovation: Latency-Aware Forward State Prediction (up to 32% lag cut across τ ∈ [0, 200] ms)</a:t>
             </a:r>
           </a:p>
         </p:txBody>
@@ -6788,10 +6799,14 @@
                 <a:spcPts val="0"/>
               </a:spcAft>
               <a:buNone/>
-            </a:pPr>
-            <a:r>
-              <a:rPr sz="1100"/>
-              <a:t>Vectorized 5x5 Rank-Order Median Filter: 10% S&amp;P cleared in 0.8 ms</a:t>
+              <a:defRPr sz="1000" b="1">
+                <a:solidFill>
+                  <a:srgbClr val="212B36"/>
+                </a:solidFill>
+              </a:defRPr>
+            </a:pPr>
+            <a:r>
+              <a:t>Supporting Perception: Top-Hat Morphology + Subpixel IWC (&lt; 0.2 px RMSE under ~10-25% S&amp;P)</a:t>
             </a:r>
           </a:p>
         </p:txBody>
@@ -6879,10 +6894,14 @@
                 <a:spcPts val="0"/>
               </a:spcAft>
               <a:buNone/>
-            </a:pPr>
-            <a:r>
-              <a:rPr sz="1100"/>
-              <a:t>Clamped Slew-Rate Servo (5.0°/s) | ≥ 35 FPS Deterministic CPU</a:t>
+              <a:defRPr sz="1000" b="1">
+                <a:solidFill>
+                  <a:srgbClr val="212B36"/>
+                </a:solidFill>
+              </a:defRPr>
+            </a:pPr>
+            <a:r>
+              <a:t>Evaluator Engine: Dual Mode (Synthetic SIL Dynamics + Offline MP4 Video Bypass with CSV Audit)</a:t>
             </a:r>
           </a:p>
         </p:txBody>
@@ -7453,152 +7472,110 @@
               <a:buChar char="•"/>
             </a:pPr>
             <a:r>
-              <a:rPr sz="969" b="1" i="0" lang="en-US">
-                <a:solidFill>
-                  <a:srgbClr val="A10000"/>
-                </a:solidFill>
-                <a:latin typeface="Calibri"/>
-              </a:rPr>
-              <a:t>Manual / Open-Loop Pointing: </a:t>
-            </a:r>
-            <a:r>
-              <a:rPr sz="969" b="0" i="0" lang="en-US">
-                <a:solidFill>
-                  <a:srgbClr val="1E2638"/>
-                </a:solidFill>
-                <a:latin typeface="Calibri"/>
-              </a:rPr>
-              <a:t>Uncertainty cones lead to prolonged search &amp; lost laser links.</a:t>
-            </a:r>
-          </a:p>
-          <a:p>
-            <a:pPr algn="l" marL="137160" indent="-137160">
-              <a:spcBef>
-                <a:spcPts val="0"/>
-              </a:spcBef>
+              <a:rPr b="1" sz="819">
+                <a:solidFill>
+                  <a:srgbClr val="991B1B"/>
+                </a:solidFill>
+              </a:rPr>
+              <a:t>• Uncertainty Blindness: </a:t>
+            </a:r>
+            <a:r>
+              <a:rPr sz="780">
+                <a:solidFill>
+                  <a:srgbClr val="212B36"/>
+                </a:solidFill>
+              </a:rPr>
+              <a:t>Conventional blind spirals ignore error covariance, causing prolonged link outages.</a:t>
+            </a:r>
+          </a:p>
+          <a:p>
+            <a:pPr>
               <a:spcAft>
                 <a:spcPts val="300"/>
               </a:spcAft>
-              <a:buClr>
-                <a:srgbClr val="C00000"/>
-              </a:buClr>
-              <a:buFont typeface="Arial"/>
-              <a:buChar char="•"/>
-            </a:pPr>
-            <a:r>
-              <a:rPr sz="969" b="1" i="0" lang="en-US">
-                <a:solidFill>
-                  <a:srgbClr val="A10000"/>
-                </a:solidFill>
-                <a:latin typeface="Calibri"/>
-              </a:rPr>
-              <a:t>Scintillation &amp; Fog Blindness: </a:t>
-            </a:r>
-            <a:r>
-              <a:rPr sz="969" b="0" i="0" lang="en-US">
-                <a:solidFill>
-                  <a:srgbClr val="1E2638"/>
-                </a:solidFill>
-                <a:latin typeface="Calibri"/>
-              </a:rPr>
-              <a:t>Atmospheric turbulence drops SNR below detection thresholds.</a:t>
-            </a:r>
-          </a:p>
-          <a:p>
-            <a:pPr algn="l" marL="137160" indent="-137160">
-              <a:spcBef>
-                <a:spcPts val="0"/>
-              </a:spcBef>
+            </a:pPr>
+            <a:r>
+              <a:rPr b="1" sz="819">
+                <a:solidFill>
+                  <a:srgbClr val="991B1B"/>
+                </a:solidFill>
+              </a:rPr>
+              <a:t>• Uncompensated Loop Latency: </a:t>
+            </a:r>
+            <a:r>
+              <a:rPr sz="780">
+                <a:solidFill>
+                  <a:srgbClr val="212B36"/>
+                </a:solidFill>
+              </a:rPr>
+              <a:t>Sensor exposure, compute and gimbal delays cause tracking lag and motor overshoot.</a:t>
+            </a:r>
+          </a:p>
+          <a:p>
+            <a:pPr>
               <a:spcAft>
                 <a:spcPts val="300"/>
               </a:spcAft>
-              <a:buClr>
-                <a:srgbClr val="C00000"/>
-              </a:buClr>
-              <a:buFont typeface="Arial"/>
-              <a:buChar char="•"/>
-            </a:pPr>
-            <a:r>
-              <a:rPr sz="969" b="1" i="0" lang="en-US">
-                <a:solidFill>
-                  <a:srgbClr val="A10000"/>
-                </a:solidFill>
-                <a:latin typeface="Calibri"/>
-              </a:rPr>
-              <a:t>Noise Centroid Hijacking: </a:t>
-            </a:r>
-            <a:r>
-              <a:rPr sz="969" b="0" i="0" lang="en-US">
-                <a:solidFill>
-                  <a:srgbClr val="1E2638"/>
-                </a:solidFill>
-                <a:latin typeface="Calibri"/>
-              </a:rPr>
-              <a:t>10% Salt &amp; Pepper noise corrupts naive first-order moment calculations.</a:t>
-            </a:r>
-          </a:p>
-          <a:p>
-            <a:pPr algn="l" marL="137160" indent="-137160">
-              <a:spcBef>
-                <a:spcPts val="0"/>
-              </a:spcBef>
+            </a:pPr>
+            <a:r>
+              <a:rPr b="1" sz="819">
+                <a:solidFill>
+                  <a:srgbClr val="991B1B"/>
+                </a:solidFill>
+              </a:rPr>
+              <a:t>• Impulsive Noise &amp; Fog: </a:t>
+            </a:r>
+            <a:r>
+              <a:rPr sz="780">
+                <a:solidFill>
+                  <a:srgbClr val="212B36"/>
+                </a:solidFill>
+              </a:rPr>
+              <a:t>PS ~10% Salt-and-Pepper noise and haze corrupt naive moment centroid calculations.</a:t>
+            </a:r>
+          </a:p>
+          <a:p>
+            <a:pPr>
               <a:spcAft>
                 <a:spcPts val="300"/>
               </a:spcAft>
-              <a:buClr>
-                <a:srgbClr val="C00000"/>
-              </a:buClr>
-              <a:buFont typeface="Arial"/>
-              <a:buChar char="•"/>
-            </a:pPr>
-            <a:r>
-              <a:rPr sz="969" b="1" i="0" lang="en-US">
-                <a:solidFill>
-                  <a:srgbClr val="A10000"/>
-                </a:solidFill>
-                <a:latin typeface="Calibri"/>
-              </a:rPr>
-              <a:t>Motor Slew Violations: </a:t>
-            </a:r>
-            <a:r>
-              <a:rPr sz="969" b="0" i="0" lang="en-US">
-                <a:solidFill>
-                  <a:srgbClr val="1E2638"/>
-                </a:solidFill>
-                <a:latin typeface="Calibri"/>
-              </a:rPr>
-              <a:t>Abrupt gimbal commands exceed motor inertia limits (5-10°/s).</a:t>
-            </a:r>
-          </a:p>
-          <a:p>
-            <a:pPr algn="l" marL="137160" indent="-137160">
-              <a:spcBef>
-                <a:spcPts val="0"/>
-              </a:spcBef>
+            </a:pPr>
+            <a:r>
+              <a:rPr b="1" sz="819">
+                <a:solidFill>
+                  <a:srgbClr val="991B1B"/>
+                </a:solidFill>
+              </a:rPr>
+              <a:t>• Gimbal Inertia Violations: </a:t>
+            </a:r>
+            <a:r>
+              <a:rPr sz="780">
+                <a:solidFill>
+                  <a:srgbClr val="212B36"/>
+                </a:solidFill>
+              </a:rPr>
+              <a:t>Unconstrained velocity commands violate physical motor slew limits (5-10°/s).</a:t>
+            </a:r>
+          </a:p>
+          <a:p>
+            <a:pPr>
               <a:spcAft>
                 <a:spcPts val="300"/>
               </a:spcAft>
-              <a:buClr>
-                <a:srgbClr val="C00000"/>
-              </a:buClr>
-              <a:buFont typeface="Arial"/>
-              <a:buChar char="•"/>
-            </a:pPr>
-            <a:r>
-              <a:rPr sz="969" b="1" i="0" lang="en-US">
-                <a:solidFill>
-                  <a:srgbClr val="A10000"/>
-                </a:solidFill>
-                <a:latin typeface="Calibri"/>
-              </a:rPr>
-              <a:t>₹50L+ Testbed Cost: </a:t>
-            </a:r>
-            <a:r>
-              <a:rPr sz="969" b="0" i="0" lang="en-US">
-                <a:solidFill>
-                  <a:srgbClr val="1E2638"/>
-                </a:solidFill>
-                <a:latin typeface="Calibri"/>
+            </a:pPr>
+            <a:r>
+              <a:rPr b="1" sz="819">
+                <a:solidFill>
+                  <a:srgbClr val="991B1B"/>
+                </a:solidFill>
+              </a:rPr>
+              <a:t>• ₹50L+ Physical Testbed: </a:t>
+            </a:r>
+            <a:r>
+              <a:rPr sz="780">
+                <a:solidFill>
+                  <a:srgbClr val="212B36"/>
+                </a:solidFill>
               </a:rPr>
               <a:t>Demands expensive physical vacuum chambers and piezo steering benches.</a:t>
             </a:r>
@@ -7800,20 +7777,20 @@
               <a:buChar char="•"/>
             </a:pPr>
             <a:r>
-              <a:rPr b="1" sz="850">
+              <a:rPr b="1" sz="830">
                 <a:solidFill>
                   <a:srgbClr val="0F2240"/>
                 </a:solidFill>
               </a:rPr>
-              <a:t>• Closed-Loop SIL Tracking: </a:t>
-            </a:r>
-            <a:r>
-              <a:rPr b="0" sz="800">
+              <a:t>• Coarse PAT Handover: </a:t>
+            </a:r>
+            <a:r>
+              <a:rPr b="0" sz="780">
                 <a:solidFill>
                   <a:srgbClr val="212B36"/>
                 </a:solidFill>
               </a:rPr>
-              <a:t>Instant lock in ≤ 0.8 s across 2000x2000 universe (22.5 arcsec/px).</a:t>
+              <a:t>Brings optical beacon into ≤ 10 px (≈ 1.09 mrad) cone for downstream FSM takeover.</a:t>
             </a:r>
           </a:p>
           <a:p>
@@ -7823,20 +7800,20 @@
               </a:spcAft>
             </a:pPr>
             <a:r>
-              <a:rPr b="1" sz="850">
+              <a:rPr b="1" sz="830">
                 <a:solidFill>
                   <a:srgbClr val="0F2240"/>
                 </a:solidFill>
               </a:rPr>
-              <a:t>• Vectorized Rank Denoising: </a:t>
-            </a:r>
-            <a:r>
-              <a:rPr b="0" sz="800">
+              <a:t>• Uncertainty-Guided Search: </a:t>
+            </a:r>
+            <a:r>
+              <a:rPr b="0" sz="780">
                 <a:solidFill>
                   <a:srgbClr val="212B36"/>
                 </a:solidFill>
               </a:rPr>
-              <a:t>5x5 median kernel strips 100% of 10% S&amp;P noise in 0.8 ms.</a:t>
+              <a:t>Covariance-driven elliptical scanning cuts reacquisition time by up to 97%.</a:t>
             </a:r>
           </a:p>
           <a:p>
@@ -7846,20 +7823,20 @@
               </a:spcAft>
             </a:pPr>
             <a:r>
-              <a:rPr b="1" sz="850">
+              <a:rPr b="1" sz="830">
                 <a:solidFill>
                   <a:srgbClr val="0F2240"/>
                 </a:solidFill>
               </a:rPr>
-              <a:t>• Sub-Pixel 2D Gaussian Fit: </a:t>
-            </a:r>
-            <a:r>
-              <a:rPr b="0" sz="800">
+              <a:t>• Latency-Compensated Pointing: </a:t>
+            </a:r>
+            <a:r>
+              <a:rPr b="0" sz="780">
                 <a:solidFill>
                   <a:srgbClr val="212B36"/>
                 </a:solidFill>
               </a:rPr>
-              <a:t>Centroid error &lt; 0.2 px (far beating ISRO's ≤ 10 px mandate by 50x).</a:t>
+              <a:t>Forward Kalman projection compensates loop delay τ ∈ [0, 200] ms (up to 32% lag cut).</a:t>
             </a:r>
           </a:p>
           <a:p>
@@ -7869,20 +7846,20 @@
               </a:spcAft>
             </a:pPr>
             <a:r>
-              <a:rPr b="1" sz="850">
+              <a:rPr b="1" sz="830">
                 <a:solidFill>
                   <a:srgbClr val="0F2240"/>
                 </a:solidFill>
               </a:rPr>
-              <a:t>• Clamped Slew-Rate Servo: </a:t>
-            </a:r>
-            <a:r>
-              <a:rPr b="0" sz="800">
+              <a:t>• Adaptive Beacon Localization: </a:t>
+            </a:r>
+            <a:r>
+              <a:rPr b="0" sz="780">
                 <a:solidFill>
                   <a:srgbClr val="212B36"/>
                 </a:solidFill>
               </a:rPr>
-              <a:t>Anti-windup PID enforces statutory 5.0°/s slew limit with velocity feedforward.</a:t>
+              <a:t>Top-Hat morphology + Subpixel IWC rejects PS ~10% S&amp;P (stress tested up to 25%).</a:t>
             </a:r>
           </a:p>
           <a:p>
@@ -7892,20 +7869,20 @@
               </a:spcAft>
             </a:pPr>
             <a:r>
-              <a:rPr b="1" sz="850">
+              <a:rPr b="1" sz="830">
                 <a:solidFill>
                   <a:srgbClr val="0F2240"/>
                 </a:solidFill>
               </a:rPr>
-              <a:t>• Deterministic CPU Runtime: </a:t>
-            </a:r>
-            <a:r>
-              <a:rPr b="0" sz="800">
+              <a:t>• Dual-Mode Evaluator Testbed: </a:t>
+            </a:r>
+            <a:r>
+              <a:rPr b="0" sz="780">
                 <a:solidFill>
                   <a:srgbClr val="212B36"/>
                 </a:solidFill>
               </a:rPr>
-              <a:t>100% offline, ≥ 35 FPS on consumer dual-core CPU with zero GPU requirement.</a:t>
+              <a:t>Runs closed-loop SIL simulator or ingests external .mp4 video with ground-truth CSV audits.</a:t>
             </a:r>
           </a:p>
         </p:txBody>
@@ -8227,7 +8204,7 @@
                   <a:srgbClr val="0F2240"/>
                 </a:solidFill>
               </a:rPr>
-              <a:t>• Coordinate Geometry: </a:t>
+              <a:t>• Scale &amp; Kinematics: </a:t>
             </a:r>
             <a:r>
               <a:rPr sz="780">
@@ -8235,7 +8212,7 @@
                   <a:srgbClr val="212B36"/>
                 </a:solidFill>
               </a:rPr>
-              <a:t>2000x2000 px world resolving 22.5 arcsec/px (4°x3° FOV).</a:t>
+              <a:t>2000x2000 px world at 109.1 μrad/px (22.5"/px default 4°x3° FOV).</a:t>
             </a:r>
           </a:p>
           <a:p>
@@ -8250,7 +8227,7 @@
                   <a:srgbClr val="0F2240"/>
                 </a:solidFill>
               </a:rPr>
-              <a:t>• Kinematic Trajectories: </a:t>
+              <a:t>• Dynamic Maneuvers: </a:t>
             </a:r>
             <a:r>
               <a:rPr sz="780">
@@ -8258,7 +8235,7 @@
                   <a:srgbClr val="212B36"/>
                 </a:solidFill>
               </a:rPr>
-              <a:t>Singer acceleration walk, Lemniscate: (x²+y²)² = 2a²(x²-y²).</a:t>
+              <a:t>Singer acceleration walk, Lemniscate: (x²+y²)² = 2a²(x²-y²), ±20 px jitter.</a:t>
             </a:r>
           </a:p>
           <a:p>
@@ -8273,7 +8250,7 @@
                   <a:srgbClr val="0F2240"/>
                 </a:solidFill>
               </a:rPr>
-              <a:t>• Pinhole Windowing: </a:t>
+              <a:t>• Virtual Pinhole FPA: </a:t>
             </a:r>
             <a:r>
               <a:rPr sz="780">
@@ -8281,7 +8258,7 @@
                   <a:srgbClr val="212B36"/>
                 </a:solidFill>
               </a:rPr>
-              <a:t>Camera matrix K crops 640x480 active FPA with motor rate limits (5-10°/s).</a:t>
+              <a:t>Camera matrix K crops 640x480 active FPA with motor rate limits (5.0°/s).</a:t>
             </a:r>
           </a:p>
         </p:txBody>
@@ -8486,7 +8463,7 @@
                   <a:srgbClr val="0F2240"/>
                 </a:solidFill>
               </a:rPr>
-              <a:t>• Airy Disc Optics: </a:t>
+              <a:t>• Diffraction Airy Optics: </a:t>
             </a:r>
             <a:r>
               <a:rPr sz="780">
@@ -8494,7 +8471,7 @@
                   <a:srgbClr val="212B36"/>
                 </a:solidFill>
               </a:rPr>
-              <a:t>Diffraction PSF I(θ) = I₀ [2J₁(u)/u]² (spot size 5x5 to 20x20 px).</a:t>
+              <a:t>Airy spot profile I(θ) = I₀ [2J₁(u)/u]² (spot size 5x5 to 20x20 px).</a:t>
             </a:r>
           </a:p>
           <a:p>
@@ -8517,7 +8494,7 @@
                   <a:srgbClr val="212B36"/>
                 </a:solidFill>
               </a:rPr>
-              <a:t>Atmospheric transmission I = I₀ exp(-γR) with dynamic fog/haze.</a:t>
+              <a:t>Atmospheric transmission I = I₀ exp(-γR) with dynamic fog and scintillation.</a:t>
             </a:r>
           </a:p>
           <a:p>
@@ -8540,7 +8517,7 @@
                   <a:srgbClr val="212B36"/>
                 </a:solidFill>
               </a:rPr>
-              <a:t>Poisson shot noise, Kolmogorov turbulence phase variance σ_R², 10% S&amp;P.</a:t>
+              <a:t>Poisson shot noise, PS-specified ~10% S&amp;P noise (stress tested up to 25%).</a:t>
             </a:r>
           </a:p>
         </p:txBody>
@@ -8745,7 +8722,7 @@
                   <a:srgbClr val="0F2240"/>
                 </a:solidFill>
               </a:rPr>
-              <a:t>• Stage 1 Rank Denoising: </a:t>
+              <a:t>• Stage 1 Adaptive Perception: </a:t>
             </a:r>
             <a:r>
               <a:rPr sz="780">
@@ -8753,7 +8730,7 @@
                   <a:srgbClr val="212B36"/>
                 </a:solidFill>
               </a:rPr>
-              <a:t>Vectorized 5x5 median kernel strips 100% impulsive noise in 0.8 ms.</a:t>
+              <a:t>Top-Hat morphology + Subpixel IWC: I(x,y) = A exp(-r²/2σ²) ⟹ RMSE &lt; 0.2 px.</a:t>
             </a:r>
           </a:p>
           <a:p>
@@ -8768,7 +8745,7 @@
                   <a:srgbClr val="0F2240"/>
                 </a:solidFill>
               </a:rPr>
-              <a:t>• Stage 2 Saliency Proposal: </a:t>
+              <a:t>• Stage 2 Latency-Aware Pointing: </a:t>
             </a:r>
             <a:r>
               <a:rPr sz="780">
@@ -8776,7 +8753,7 @@
                   <a:srgbClr val="212B36"/>
                 </a:solidFill>
               </a:rPr>
-              <a:t>Spatio-temporal gradient heatmap isolates candidate beacon ROI.</a:t>
+              <a:t>Kalman forward state projection x̂_(t+τ) = F^κ x̂_t compensates loop delay τ.</a:t>
             </a:r>
           </a:p>
           <a:p>
@@ -8791,7 +8768,7 @@
                   <a:srgbClr val="0F2240"/>
                 </a:solidFill>
               </a:rPr>
-              <a:t>• Stage 3 Gaussian Fit: </a:t>
+              <a:t>• Stage 3 Covariance Reacquisition: </a:t>
             </a:r>
             <a:r>
               <a:rPr sz="780">
@@ -8799,7 +8776,7 @@
                   <a:srgbClr val="212B36"/>
                 </a:solidFill>
               </a:rPr>
-              <a:t>Continuous surface fit: I(x,y) = A exp(-r²/2σ²) + B ⟹ RMSE &lt; 0.2 px.</a:t>
+              <a:t>Scans growing uncertainty ellipse (σ_a, σ_b, φ) on temporary signal loss.</a:t>
             </a:r>
           </a:p>
           <a:p>
@@ -8814,7 +8791,7 @@
                   <a:srgbClr val="0F2240"/>
                 </a:solidFill>
               </a:rPr>
-              <a:t>• Stage 4 IMM Servo Loop: </a:t>
+              <a:t>• Stage 4 Gimbal Servo Loop: </a:t>
             </a:r>
             <a:r>
               <a:rPr sz="780">
@@ -8822,7 +8799,7 @@
                   <a:srgbClr val="212B36"/>
                 </a:solidFill>
               </a:rPr>
-              <a:t>Kalman filter blends CV &amp; CT states; feeds anti-windup PID clamped to ≤ 5°/s.</a:t>
+              <a:t>Anti-windup PID with velocity feedforward strictly clamped to ≤ 5.0°/s.</a:t>
             </a:r>
           </a:p>
         </p:txBody>
@@ -9069,12 +9046,12 @@
               <a:buNone/>
             </a:pPr>
             <a:r>
-              <a:rPr sz="950" b="1">
+              <a:rPr sz="900" b="1">
                 <a:solidFill>
                   <a:srgbClr val="0F2240"/>
                 </a:solidFill>
               </a:rPr>
-              <a:t>Sub-Pixel Gray-Diffusion</a:t>
+              <a:t>Uncertainty-Guided Search</a:t>
             </a:r>
           </a:p>
         </p:txBody>
@@ -9109,14 +9086,14 @@
                 <a:spcPts val="0"/>
               </a:spcAft>
               <a:buNone/>
-              <a:defRPr sz="750">
+              <a:defRPr sz="730">
                 <a:solidFill>
                   <a:srgbClr val="212B36"/>
                 </a:solidFill>
               </a:defRPr>
             </a:pPr>
             <a:r>
-              <a:t>I(x,y) = A exp(-r²/2σ²); analytical Gaussian surface fitting eliminates pixel quantization, guaranteeing &lt; 0.2 px centroid accuracy under dense noise.</a:t>
+              <a:t>Filter covariance P_k expands during outages; scan expands along uncertainty ellipse (σ_a, σ_b, φ), reacquiring up to 97% faster than blind spirals.</a:t>
             </a:r>
           </a:p>
         </p:txBody>
@@ -9246,12 +9223,12 @@
               <a:buNone/>
             </a:pPr>
             <a:r>
-              <a:rPr sz="950" b="1">
+              <a:rPr sz="900" b="1">
                 <a:solidFill>
                   <a:srgbClr val="0F2240"/>
                 </a:solidFill>
               </a:rPr>
-              <a:t>IMM Multi-Model Filter</a:t>
+              <a:t>Latency Compensation (H1)</a:t>
             </a:r>
           </a:p>
         </p:txBody>
@@ -9286,14 +9263,14 @@
                 <a:spcPts val="0"/>
               </a:spcAft>
               <a:buNone/>
-              <a:defRPr sz="750">
+              <a:defRPr sz="730">
                 <a:solidFill>
                   <a:srgbClr val="212B36"/>
                 </a:solidFill>
               </a:defRPr>
             </a:pPr>
             <a:r>
-              <a:t>Mode mixing μ_k^(j) = (1/c) Λ_k^(j) ∑ p_ij μ_(k-1)^(i); dynamically blends Constant Velocity &amp; Coordinated Turn states, eliminating lag during Figure-8 reversals.</a:t>
+              <a:t>Forward state projection x̂_(t+τ) = F^κ x̂_t compensates cumulative frame/compute/servo delay τ (0-200 ms), cutting tracking lag by up to 32%.</a:t>
             </a:r>
           </a:p>
         </p:txBody>
@@ -9423,12 +9400,12 @@
               <a:buNone/>
             </a:pPr>
             <a:r>
-              <a:rPr sz="950" b="1">
+              <a:rPr sz="900" b="1">
                 <a:solidFill>
                   <a:srgbClr val="0F2240"/>
                 </a:solidFill>
               </a:rPr>
-              <a:t>Anti-Windup Slew Servo</a:t>
+              <a:t>Top-Hat Morphology + IWC</a:t>
             </a:r>
           </a:p>
         </p:txBody>
@@ -9463,14 +9440,14 @@
                 <a:spcPts val="0"/>
               </a:spcAft>
               <a:buNone/>
-              <a:defRPr sz="750">
+              <a:defRPr sz="730">
                 <a:solidFill>
                   <a:srgbClr val="212B36"/>
                 </a:solidFill>
               </a:defRPr>
             </a:pPr>
             <a:r>
-              <a:t>θ_dot = sat_[-5°, 5°](Kp e + Kd e_dot + Ki ∫e); enforces strict 5-10°/s motor slew limits with predictive velocity feedforward, avoiding overshoot.</a:t>
+              <a:t>Morphological background suppression + subpixel Intensity-Weighted Centroiding achieves &lt; 0.2 px RMSE, rejecting PS ~10% S&amp;P and 25% stress noise without heavy YOLO.</a:t>
             </a:r>
           </a:p>
         </p:txBody>
@@ -9600,12 +9577,12 @@
               <a:buNone/>
             </a:pPr>
             <a:r>
-              <a:rPr sz="950" b="1">
+              <a:rPr sz="900" b="1">
                 <a:solidFill>
                   <a:srgbClr val="0F2240"/>
                 </a:solidFill>
               </a:rPr>
-              <a:t>Deterministic CPU Runtime</a:t>
+              <a:t>Dual-Mode SIL / MP4 Engine</a:t>
             </a:r>
           </a:p>
         </p:txBody>
@@ -9640,14 +9617,14 @@
                 <a:spcPts val="0"/>
               </a:spcAft>
               <a:buNone/>
-              <a:defRPr sz="750">
+              <a:defRPr sz="730">
                 <a:solidFill>
                   <a:srgbClr val="212B36"/>
                 </a:solidFill>
               </a:defRPr>
             </a:pPr>
             <a:r>
-              <a:t>Total pipeline latency T_frame ≤ 19.9 ms ≪ 33.3 ms (≥ 35 FPS) on consumer dual-core CPU with zero discrete GPU requirement.</a:t>
+              <a:t>Decoupled SIL testbed &amp; MP4 video benchmark engine: ingests synthetic physics or external camera video with ground-truth CSV error verification.</a:t>
             </a:r>
           </a:p>
         </p:txBody>
@@ -9777,12 +9754,12 @@
               <a:buNone/>
             </a:pPr>
             <a:r>
-              <a:rPr sz="950" b="1">
+              <a:rPr sz="900" b="1">
                 <a:solidFill>
                   <a:srgbClr val="0F2240"/>
                 </a:solidFill>
               </a:rPr>
-              <a:t>Zero-Capex SIL Platform</a:t>
+              <a:t>Defined Coarse PAT Scope</a:t>
             </a:r>
           </a:p>
         </p:txBody>
@@ -9817,14 +9794,14 @@
                 <a:spcPts val="0"/>
               </a:spcAft>
               <a:buNone/>
-              <a:defRPr sz="750">
+              <a:defRPr sz="730">
                 <a:solidFill>
                   <a:srgbClr val="212B36"/>
                 </a:solidFill>
               </a:defRPr>
             </a:pPr>
             <a:r>
-              <a:t>Saves ₹50L+ per testing campaign; fully offline air-gapped simulation enables repeatable Monte Carlo stress tests matching ISRO criteria.</a:t>
+              <a:t>Bounded to coarse PAT stage (109.1 μrad/px). Guarantees ≤ 10 px (≈ 1.09 mrad) capture cone for handover to downstream 10 kHz FSM fine-pointing stage.</a:t>
             </a:r>
           </a:p>
         </p:txBody>
@@ -10425,7 +10402,7 @@
               </a:defRPr>
             </a:pPr>
             <a:r>
-              <a:t>Lemniscate (x²+y²)² = 2a²(x²-y²) &amp; Singer acceleration walk across 2000x2000 space (22.5 arcsec/px).</a:t>
+              <a:t>Global Universe Kinematics: 2000x2000 universe at 109.1 μrad/px (22.5"/px default 4°x3° FOV), propagating Lemniscate and Singer walks.</a:t>
             </a:r>
           </a:p>
         </p:txBody>
@@ -10603,7 +10580,7 @@
               </a:defRPr>
             </a:pPr>
             <a:r>
-              <a:t>Multi-harmonic angular vibration θ_jit(t) = ∑ A_k sin(2π f_k t + φ_k) injecting ±20 px satellite resonance.</a:t>
+              <a:t>Platform Jitter &amp; Dynamics: Enforces 5.0°/s motor slew limit and multi-harmonic platform vibration θ_jit(t) = ∑ A_k sin(2π f_k t + φ_k).</a:t>
             </a:r>
           </a:p>
         </p:txBody>
@@ -10781,7 +10758,7 @@
               </a:defRPr>
             </a:pPr>
             <a:r>
-              <a:t>Diffraction Airy PSF I(θ) = I₀ [2J₁(u)/u]² with Beer-Lambert extinction I = I₀ exp(-γR) &amp; 10% S&amp;P noise.</a:t>
+              <a:t>Physical Optical Degradation: Diffraction Airy PSF I(θ) = I₀ [2J₁(u)/u]², Beer-Lambert fog, Poisson noise, and PS ~10% S&amp;P (stress tested to 25%).</a:t>
             </a:r>
           </a:p>
         </p:txBody>
@@ -10959,7 +10936,7 @@
               </a:defRPr>
             </a:pPr>
             <a:r>
-              <a:t>Pinhole projective camera matrix K crops 640x480 active FPA (4°x3° FOV) with pan/tilt inertia.</a:t>
+              <a:t>Sensor Windowing &amp; Latency Queue: Pinhole matrix K crops 640x480 active FPA; LatencyQueue models cumulative loop delay τ ∈ [0, 200] ms.</a:t>
             </a:r>
           </a:p>
         </p:txBody>
@@ -11137,7 +11114,7 @@
               </a:defRPr>
             </a:pPr>
             <a:r>
-              <a:t>Vectorized 5x5 rank-order median filter + continuous 2D Gaussian fit: RMSE &lt; 0.2 px in 0.8 ms.</a:t>
+              <a:t>Adaptive Localization &amp; Subpixel IWC: Top-Hat background suppression + Intensity-Weighted Centroiding achieves &lt; 0.2 px RMSE without heavy YOLO.</a:t>
             </a:r>
           </a:p>
         </p:txBody>
@@ -11294,7 +11271,7 @@
               </a:defRPr>
             </a:pPr>
             <a:r>
-              <a:t>IMM-KF blends CV &amp; CT states; feeds anti-windup PID servo clamped to statutory ≤ 5.0°/s slew limit.</a:t>
+              <a:t>Predictive Pointing &amp; Reacquisition: Latency-compensated state projection (H1: 32% lag cut) + Covariance ellipse search on loss (H2: 97% faster re-lock).</a:t>
             </a:r>
           </a:p>
         </p:txBody>
@@ -11446,7 +11423,7 @@
         <p:spPr>
           <a:xfrm>
             <a:off x="6309360" y="4251960"/>
-            <a:ext cx="1554480" cy="365760"/>
+            <a:ext cx="1645920" cy="365760"/>
           </a:xfrm>
           <a:prstGeom prst="rect">
             <a:avLst/>
@@ -11467,7 +11444,7 @@
               </a:defRPr>
             </a:pPr>
             <a:r>
-              <a:t>IMM Kinematics</a:t>
+              <a:t>State Estimation (H1)</a:t>
             </a:r>
           </a:p>
         </p:txBody>
@@ -11480,8 +11457,8 @@
         </p:nvSpPr>
         <p:spPr>
           <a:xfrm>
-            <a:off x="7909560" y="4251960"/>
-            <a:ext cx="3593592" cy="411480"/>
+            <a:off x="8001000" y="4251960"/>
+            <a:ext cx="3502152" cy="411480"/>
           </a:xfrm>
           <a:prstGeom prst="rect">
             <a:avLst/>
@@ -11502,7 +11479,7 @@
               </a:defRPr>
             </a:pPr>
             <a:r>
-              <a:t>Dual-mode Kalman filter combining CV and CT models to eliminate lag: μ_k^(j)</a:t>
+              <a:t>Latency-compensated Kalman filter projecting x̂_(t+τ) across loop delay τ (up to 32% lag cut)</a:t>
             </a:r>
           </a:p>
         </p:txBody>
@@ -11516,7 +11493,7 @@
         <p:spPr>
           <a:xfrm>
             <a:off x="6309360" y="4754880"/>
-            <a:ext cx="1554480" cy="365760"/>
+            <a:ext cx="1645920" cy="365760"/>
           </a:xfrm>
           <a:prstGeom prst="rect">
             <a:avLst/>
@@ -11537,7 +11514,7 @@
               </a:defRPr>
             </a:pPr>
             <a:r>
-              <a:t>Servo Control Loop</a:t>
+              <a:t>Reacquisition (H2)</a:t>
             </a:r>
           </a:p>
         </p:txBody>
@@ -11550,8 +11527,8 @@
         </p:nvSpPr>
         <p:spPr>
           <a:xfrm>
-            <a:off x="7909560" y="4754880"/>
-            <a:ext cx="3593592" cy="411480"/>
+            <a:off x="8001000" y="4754880"/>
+            <a:ext cx="3502152" cy="411480"/>
           </a:xfrm>
           <a:prstGeom prst="rect">
             <a:avLst/>
@@ -11572,7 +11549,7 @@
               </a:defRPr>
             </a:pPr>
             <a:r>
-              <a:t>Feedforward predictive anti-windup PID (strict 5.0°/s slew clamping: sat_[-5,5])</a:t>
+              <a:t>Uncertainty-guided covariance ellipse search cutting link recovery time by up to 97%</a:t>
             </a:r>
           </a:p>
         </p:txBody>
@@ -11621,7 +11598,7 @@
         <p:spPr>
           <a:xfrm>
             <a:off x="6309360" y="5257800"/>
-            <a:ext cx="1554480" cy="365760"/>
+            <a:ext cx="1645920" cy="365760"/>
           </a:xfrm>
           <a:prstGeom prst="rect">
             <a:avLst/>
@@ -11642,7 +11619,7 @@
               </a:defRPr>
             </a:pPr>
             <a:r>
-              <a:t>Tactical Cockpit GUI</a:t>
+              <a:t>Coarse Handover SLA</a:t>
             </a:r>
           </a:p>
         </p:txBody>
@@ -11655,8 +11632,8 @@
         </p:nvSpPr>
         <p:spPr>
           <a:xfrm>
-            <a:off x="7909560" y="5257800"/>
-            <a:ext cx="3593592" cy="411480"/>
+            <a:off x="8001000" y="5257800"/>
+            <a:ext cx="3502152" cy="411480"/>
           </a:xfrm>
           <a:prstGeom prst="rect">
             <a:avLst/>
@@ -11677,7 +11654,7 @@
               </a:defRPr>
             </a:pPr>
             <a:r>
-              <a:t>OpenCV Tactical HUD &amp; Live Web Radar (HTTP 8080) with manual PTZ override</a:t>
+              <a:t>Stabilizes line-of-sight inside ≤ 10 px (≈ 1.09 mrad) cone for downstream FSM / QPD stage</a:t>
             </a:r>
           </a:p>
         </p:txBody>
@@ -11726,7 +11703,7 @@
         <p:spPr>
           <a:xfrm>
             <a:off x="6309360" y="5760720"/>
-            <a:ext cx="1554480" cy="365760"/>
+            <a:ext cx="1645920" cy="365760"/>
           </a:xfrm>
           <a:prstGeom prst="rect">
             <a:avLst/>
@@ -11747,7 +11724,7 @@
               </a:defRPr>
             </a:pPr>
             <a:r>
-              <a:t>Compliance &amp; CI</a:t>
+              <a:t>Evaluator Engine</a:t>
             </a:r>
           </a:p>
         </p:txBody>
@@ -11760,8 +11737,8 @@
         </p:nvSpPr>
         <p:spPr>
           <a:xfrm>
-            <a:off x="7909560" y="5760720"/>
-            <a:ext cx="3593592" cy="411480"/>
+            <a:off x="8001000" y="5760720"/>
+            <a:ext cx="3502152" cy="411480"/>
           </a:xfrm>
           <a:prstGeom prst="rect">
             <a:avLst/>
@@ -11782,7 +11759,7 @@
               </a:defRPr>
             </a:pPr>
             <a:r>
-              <a:t>Automated CSV/PDF Benchmark-2 audit engine logging RMSE, latency, &amp; lock retention</a:t>
+              <a:t>Dual mode: Real-time SIL simulator + Offline .mp4 video benchmark bypass with CSV audit</a:t>
             </a:r>
           </a:p>
         </p:txBody>
@@ -13345,88 +13322,42 @@
               <a:buChar char="•"/>
             </a:pPr>
             <a:r>
-              <a:rPr sz="919" b="1" i="0" lang="en-US">
-                <a:solidFill>
-                  <a:srgbClr val="14345C"/>
-                </a:solidFill>
-                <a:latin typeface="Calibri"/>
-              </a:rPr>
-              <a:t>Rapid Setup: </a:t>
-            </a:r>
-            <a:r>
-              <a:rPr sz="919" b="0" i="0" lang="en-US">
-                <a:solidFill>
-                  <a:srgbClr val="1E2638"/>
-                </a:solidFill>
-                <a:latin typeface="Calibri"/>
-              </a:rPr>
-              <a:t>&lt; 1 min zero-config launch on Windows/macOS.</a:t>
-            </a:r>
-          </a:p>
-          <a:p>
-            <a:pPr algn="l" marL="137160" indent="-137160">
-              <a:spcBef>
-                <a:spcPts val="0"/>
-              </a:spcBef>
+              <a:rPr sz="780">
+                <a:solidFill>
+                  <a:srgbClr val="212B36"/>
+                </a:solidFill>
+              </a:rPr>
+              <a:t>Rapid Setup: &lt; 1 min zero-config launch on Windows/macOS (1-click standalone binaries).</a:t>
+            </a:r>
+          </a:p>
+          <a:p>
+            <a:pPr>
               <a:spcAft>
                 <a:spcPts val="200"/>
               </a:spcAft>
-              <a:buClr>
-                <a:srgbClr val="D9700F"/>
-              </a:buClr>
-              <a:buFont typeface="Arial"/>
-              <a:buChar char="•"/>
-            </a:pPr>
-            <a:r>
-              <a:rPr sz="919" b="1" i="0" lang="en-US">
-                <a:solidFill>
-                  <a:srgbClr val="14345C"/>
-                </a:solidFill>
-                <a:latin typeface="Calibri"/>
-              </a:rPr>
-              <a:t>Benchmark Bypass: </a:t>
-            </a:r>
-            <a:r>
-              <a:rPr sz="919" b="0" i="0" lang="en-US">
-                <a:solidFill>
-                  <a:srgbClr val="1E2638"/>
-                </a:solidFill>
-                <a:latin typeface="Calibri"/>
-              </a:rPr>
-              <a:t>Drag-and-drop ingestion of external .mp4 video files.</a:t>
-            </a:r>
-          </a:p>
-          <a:p>
-            <a:pPr algn="l" marL="137160" indent="-137160">
-              <a:spcBef>
-                <a:spcPts val="0"/>
-              </a:spcBef>
+            </a:pPr>
+            <a:r>
+              <a:rPr sz="780">
+                <a:solidFill>
+                  <a:srgbClr val="212B36"/>
+                </a:solidFill>
+              </a:rPr>
+              <a:t>Benchmark Bypass: Decoupled ingestion of external .mp4 video files with ground-truth CSV.</a:t>
+            </a:r>
+          </a:p>
+          <a:p>
+            <a:pPr>
               <a:spcAft>
                 <a:spcPts val="200"/>
               </a:spcAft>
-              <a:buClr>
-                <a:srgbClr val="D9700F"/>
-              </a:buClr>
-              <a:buFont typeface="Arial"/>
-              <a:buChar char="•"/>
-            </a:pPr>
-            <a:r>
-              <a:rPr sz="919" b="1" i="0" lang="en-US">
-                <a:solidFill>
-                  <a:srgbClr val="14345C"/>
-                </a:solidFill>
-                <a:latin typeface="Calibri"/>
-              </a:rPr>
-              <a:t>Repeatable Runs: </a:t>
-            </a:r>
-            <a:r>
-              <a:rPr sz="919" b="0" i="0" lang="en-US">
-                <a:solidFill>
-                  <a:srgbClr val="1E2638"/>
-                </a:solidFill>
-                <a:latin typeface="Calibri"/>
-              </a:rPr>
-              <a:t>Deterministic PRNG seeds for reproducible jury audits.</a:t>
+            </a:pPr>
+            <a:r>
+              <a:rPr sz="780">
+                <a:solidFill>
+                  <a:srgbClr val="212B36"/>
+                </a:solidFill>
+              </a:rPr>
+              <a:t>Repeatable Runs: Deterministic PRNG seeds for reproducible jury audits &amp; H1/H2 verification.</a:t>
             </a:r>
           </a:p>
         </p:txBody>
@@ -14591,15 +14522,14 @@
                 <a:spcPts val="0"/>
               </a:spcAft>
               <a:buNone/>
-            </a:pPr>
-            <a:r>
-              <a:rPr sz="940" b="1" i="0" lang="en-US">
-                <a:solidFill>
-                  <a:srgbClr val="14345C"/>
-                </a:solidFill>
-                <a:latin typeface="Calibri"/>
-              </a:rPr>
-              <a:t>10% Salt &amp; Pepper + Poisson Noise</a:t>
+              <a:defRPr sz="850" b="1">
+                <a:solidFill>
+                  <a:srgbClr val="0F2240"/>
+                </a:solidFill>
+              </a:defRPr>
+            </a:pPr>
+            <a:r>
+              <a:t>PS-Specified ~10% S&amp;P Noise (Stress to 25%)</a:t>
             </a:r>
           </a:p>
         </p:txBody>
@@ -14637,14 +14567,14 @@
                 <a:spcPts val="0"/>
               </a:spcAft>
               <a:buNone/>
-              <a:defRPr sz="780">
+              <a:defRPr sz="760">
                 <a:solidFill>
                   <a:srgbClr val="212B36"/>
                 </a:solidFill>
               </a:defRPr>
             </a:pPr>
             <a:r>
-              <a:t>→ Vectorized 5x5 rank-order median filter eliminates 100% impulsive salt-and-pepper noise in 0.8 ms before feature extraction.</a:t>
+              <a:t>→ Vectorized rank-order median filter + Top-Hat morphology strips impulsive noise in 0.8 ms, maintaining &lt; 0.2 px subpixel centroid accuracy.</a:t>
             </a:r>
           </a:p>
         </p:txBody>
@@ -14751,15 +14681,14 @@
                 <a:spcPts val="0"/>
               </a:spcAft>
               <a:buNone/>
-            </a:pPr>
-            <a:r>
-              <a:rPr sz="940" b="1" i="0" lang="en-US">
-                <a:solidFill>
-                  <a:srgbClr val="14345C"/>
-                </a:solidFill>
-                <a:latin typeface="Calibri"/>
-              </a:rPr>
-              <a:t>Maneuvering Lag in Figure-8 Turns</a:t>
+              <a:defRPr sz="850" b="1">
+                <a:solidFill>
+                  <a:srgbClr val="0F2240"/>
+                </a:solidFill>
+              </a:defRPr>
+            </a:pPr>
+            <a:r>
+              <a:t>Loop Latency &amp; Actuator Delay (0–200 ms)</a:t>
             </a:r>
           </a:p>
         </p:txBody>
@@ -14797,14 +14726,14 @@
                 <a:spcPts val="0"/>
               </a:spcAft>
               <a:buNone/>
-              <a:defRPr sz="780">
+              <a:defRPr sz="760">
                 <a:solidFill>
                   <a:srgbClr val="212B36"/>
                 </a:solidFill>
               </a:defRPr>
             </a:pPr>
             <a:r>
-              <a:t>→ IMM multi-hypothesis Kalman filter (μ_k^(CV) ↔ μ_k^(CT)) dynamically adapts between linear drift and high-g turning with zero lag.</a:t>
+              <a:t>→ Forward state projection (H1) compensates cumulative frame, compute, and motor delay, reducing steady-state pointing lag by up to 32%.</a:t>
             </a:r>
           </a:p>
         </p:txBody>
@@ -14911,15 +14840,14 @@
                 <a:spcPts val="0"/>
               </a:spcAft>
               <a:buNone/>
-            </a:pPr>
-            <a:r>
-              <a:rPr sz="940" b="1" i="0" lang="en-US">
-                <a:solidFill>
-                  <a:srgbClr val="14345C"/>
-                </a:solidFill>
-                <a:latin typeface="Calibri"/>
-              </a:rPr>
-              <a:t>Gimbal Slew Constraints (5-10°/s)</a:t>
+              <a:defRPr sz="850" b="1">
+                <a:solidFill>
+                  <a:srgbClr val="0F2240"/>
+                </a:solidFill>
+              </a:defRPr>
+            </a:pPr>
+            <a:r>
+              <a:t>Gimbal Dynamics &amp; Slew Limits (5–10°/s)</a:t>
             </a:r>
           </a:p>
         </p:txBody>
@@ -14957,14 +14885,14 @@
                 <a:spcPts val="0"/>
               </a:spcAft>
               <a:buNone/>
-              <a:defRPr sz="780">
+              <a:defRPr sz="760">
                 <a:solidFill>
                   <a:srgbClr val="212B36"/>
                 </a:solidFill>
               </a:defRPr>
             </a:pPr>
             <a:r>
-              <a:t>→ Anti-windup saturated velocity PID profiler (θ_dot ≤ 5.0°/s) prevents motor torque saturation and models real gimbal inertia.</a:t>
+              <a:t>→ Anti-windup saturated velocity PID profiler (θ_dot ≤ 5.0°/s) prevents motor torque saturation and models real gimbal inertia with zero overshoot.</a:t>
             </a:r>
           </a:p>
         </p:txBody>
@@ -15071,15 +14999,14 @@
                 <a:spcPts val="0"/>
               </a:spcAft>
               <a:buNone/>
-            </a:pPr>
-            <a:r>
-              <a:rPr sz="940" b="1" i="0" lang="en-US">
-                <a:solidFill>
-                  <a:srgbClr val="14345C"/>
-                </a:solidFill>
-                <a:latin typeface="Calibri"/>
-              </a:rPr>
-              <a:t>Low-Contrast Beacon in Dense Fog</a:t>
+              <a:defRPr sz="850" b="1">
+                <a:solidFill>
+                  <a:srgbClr val="0F2240"/>
+                </a:solidFill>
+              </a:defRPr>
+            </a:pPr>
+            <a:r>
+              <a:t>Visibility Outages &amp; Cloud/Fog Drops</a:t>
             </a:r>
           </a:p>
         </p:txBody>
@@ -15117,14 +15044,14 @@
                 <a:spcPts val="0"/>
               </a:spcAft>
               <a:buNone/>
-              <a:defRPr sz="780">
+              <a:defRPr sz="760">
                 <a:solidFill>
                   <a:srgbClr val="212B36"/>
                 </a:solidFill>
               </a:defRPr>
             </a:pPr>
             <a:r>
-              <a:t>→ Deep saliency proposal fuses spatial gradients to isolate faint beacon spots under Beer-Lambert extinction (I = I₀ exp(-γR)).</a:t>
+              <a:t>→ Uncertainty-guided reacquisition (H2) scans growing covariance ellipse, reacquiring lost beacon up to 97% faster than blind spirals.</a:t>
             </a:r>
           </a:p>
         </p:txBody>
@@ -15231,10 +15158,14 @@
                 <a:spcPts val="0"/>
               </a:spcAft>
               <a:buNone/>
-              <a:defRPr sz="900"/>
-            </a:pPr>
-            <a:r>
-              <a:t>Multi-Terminal Network Latency</a:t>
+              <a:defRPr sz="850" b="1">
+                <a:solidFill>
+                  <a:srgbClr val="0F2240"/>
+                </a:solidFill>
+              </a:defRPr>
+            </a:pPr>
+            <a:r>
+              <a:t>Independent Evaluator Verification</a:t>
             </a:r>
           </a:p>
         </p:txBody>
@@ -15272,14 +15203,14 @@
                 <a:spcPts val="0"/>
               </a:spcAft>
               <a:buNone/>
-              <a:defRPr sz="780">
+              <a:defRPr sz="760">
                 <a:solidFill>
                   <a:srgbClr val="212B36"/>
                 </a:solidFill>
               </a:defRPr>
             </a:pPr>
             <a:r>
-              <a:t>→ Non-blocking UDP with 8KB MTU fragmentation decouples 30 Hz edge vision from 60 Hz web cockpit with zero packet lag.</a:t>
+              <a:t>→ Decoupled MP4 bypass ingests external real/synthetic videos; standalone 1-click macOS DMG (61 MB) &amp; Windows EXE enable immediate jury testing.</a:t>
             </a:r>
           </a:p>
         </p:txBody>
@@ -17015,15 +16946,14 @@
                 <a:spcPts val="0"/>
               </a:spcAft>
               <a:buNone/>
-            </a:pPr>
-            <a:r>
-              <a:rPr sz="930" b="1" i="0" lang="en-US">
-                <a:solidFill>
-                  <a:srgbClr val="FFB35C"/>
-                </a:solidFill>
-                <a:latin typeface="Calibri"/>
-              </a:rPr>
-              <a:t>Zero-Install Runtime</a:t>
+              <a:defRPr sz="850" b="1">
+                <a:solidFill>
+                  <a:srgbClr val="0F2240"/>
+                </a:solidFill>
+              </a:defRPr>
+            </a:pPr>
+            <a:r>
+              <a:t>1-Click Native Runtime</a:t>
             </a:r>
           </a:p>
         </p:txBody>
@@ -17058,15 +16988,14 @@
                 <a:spcPts val="0"/>
               </a:spcAft>
               <a:buNone/>
-            </a:pPr>
-            <a:r>
-              <a:rPr sz="840" b="0" i="0" lang="en-US">
-                <a:solidFill>
-                  <a:srgbClr val="E4ECF7"/>
-                </a:solidFill>
-                <a:latin typeface="Calibri"/>
-              </a:rPr>
-              <a:t>Standalone cross-platform executable starts in &lt; 30 seconds with zero hardware prerequisites.</a:t>
+              <a:defRPr sz="750">
+                <a:solidFill>
+                  <a:srgbClr val="212B36"/>
+                </a:solidFill>
+              </a:defRPr>
+            </a:pPr>
+            <a:r>
+              <a:t>Standalone cross-platform app (macOS 61 MB DMG / Windows EXE) runs 100% offline in &lt; 30 seconds.</a:t>
             </a:r>
           </a:p>
         </p:txBody>
@@ -17134,14 +17063,13 @@
                 <a:spcPts val="0"/>
               </a:spcAft>
               <a:buNone/>
-            </a:pPr>
-            <a:r>
-              <a:rPr sz="1350" b="1" i="0" lang="en-US">
+              <a:defRPr sz="1100" b="1">
                 <a:solidFill>
                   <a:srgbClr val="0F2240"/>
                 </a:solidFill>
-                <a:latin typeface="Calibri"/>
-              </a:rPr>
+              </a:defRPr>
+            </a:pPr>
+            <a:r>
               <a:t>100% Offline</a:t>
             </a:r>
           </a:p>
@@ -17177,15 +17105,14 @@
                 <a:spcPts val="0"/>
               </a:spcAft>
               <a:buNone/>
-            </a:pPr>
-            <a:r>
-              <a:rPr sz="780" b="0" i="0" lang="en-US">
+              <a:defRPr sz="750">
                 <a:solidFill>
                   <a:srgbClr val="475569"/>
                 </a:solidFill>
-                <a:latin typeface="Calibri"/>
-              </a:rPr>
-              <a:t>Zero setup time</a:t>
+              </a:defRPr>
+            </a:pPr>
+            <a:r>
+              <a:t>macOS &amp; Win native</a:t>
             </a:r>
           </a:p>
         </p:txBody>
@@ -17294,15 +17221,14 @@
                 <a:spcPts val="0"/>
               </a:spcAft>
               <a:buNone/>
-            </a:pPr>
-            <a:r>
-              <a:rPr sz="930" b="1" i="0" lang="en-US">
-                <a:solidFill>
-                  <a:srgbClr val="FFB35C"/>
-                </a:solidFill>
-                <a:latin typeface="Calibri"/>
-              </a:rPr>
-              <a:t>Multi-Disturbance Scaling</a:t>
+              <a:defRPr sz="850" b="1">
+                <a:solidFill>
+                  <a:srgbClr val="0F2240"/>
+                </a:solidFill>
+              </a:defRPr>
+            </a:pPr>
+            <a:r>
+              <a:t>Empirical SIL Testbed</a:t>
             </a:r>
           </a:p>
         </p:txBody>
@@ -17337,15 +17263,14 @@
                 <a:spcPts val="0"/>
               </a:spcAft>
               <a:buNone/>
-            </a:pPr>
-            <a:r>
-              <a:rPr sz="840" b="0" i="0" lang="en-US">
-                <a:solidFill>
-                  <a:srgbClr val="E4ECF7"/>
-                </a:solidFill>
-                <a:latin typeface="Calibri"/>
-              </a:rPr>
-              <a:t>Generates a 2000x2000 universe with 10% S&amp;P noise, Beer-Lambert fog, and ±20 px platform jitter.</a:t>
+              <a:defRPr sz="750">
+                <a:solidFill>
+                  <a:srgbClr val="212B36"/>
+                </a:solidFill>
+              </a:defRPr>
+            </a:pPr>
+            <a:r>
+              <a:t>Models 109.1 μrad/px scale, loop latency (0-200 ms), PS ~10% S&amp;P, and dynamic platform motion.</a:t>
             </a:r>
           </a:p>
         </p:txBody>
@@ -17413,15 +17338,14 @@
                 <a:spcPts val="0"/>
               </a:spcAft>
               <a:buNone/>
-            </a:pPr>
-            <a:r>
-              <a:rPr sz="1350" b="1" i="0" lang="en-US">
+              <a:defRPr sz="1100" b="1">
                 <a:solidFill>
                   <a:srgbClr val="0F2240"/>
                 </a:solidFill>
-                <a:latin typeface="Calibri"/>
-              </a:rPr>
-              <a:t>Deterministic</a:t>
+              </a:defRPr>
+            </a:pPr>
+            <a:r>
+              <a:t>109.1 μrad/px</a:t>
             </a:r>
           </a:p>
         </p:txBody>
@@ -17456,15 +17380,14 @@
                 <a:spcPts val="0"/>
               </a:spcAft>
               <a:buNone/>
-            </a:pPr>
-            <a:r>
-              <a:rPr sz="780" b="0" i="0" lang="en-US">
+              <a:defRPr sz="750">
                 <a:solidFill>
                   <a:srgbClr val="475569"/>
                 </a:solidFill>
-                <a:latin typeface="Calibri"/>
-              </a:rPr>
-              <a:t>30 Hz loop</a:t>
+              </a:defRPr>
+            </a:pPr>
+            <a:r>
+              <a:t>Default 4°x3° FOV</a:t>
             </a:r>
           </a:p>
         </p:txBody>
@@ -17573,15 +17496,14 @@
                 <a:spcPts val="0"/>
               </a:spcAft>
               <a:buNone/>
-            </a:pPr>
-            <a:r>
-              <a:rPr sz="930" b="1" i="0" lang="en-US">
-                <a:solidFill>
-                  <a:srgbClr val="FFB35C"/>
-                </a:solidFill>
-                <a:latin typeface="Calibri"/>
-              </a:rPr>
-              <a:t>Instant Lock Acquisition</a:t>
+              <a:defRPr sz="850" b="1">
+                <a:solidFill>
+                  <a:srgbClr val="0F2240"/>
+                </a:solidFill>
+              </a:defRPr>
+            </a:pPr>
+            <a:r>
+              <a:t>Latency-Compensated Lock</a:t>
             </a:r>
           </a:p>
         </p:txBody>
@@ -17616,15 +17538,14 @@
                 <a:spcPts val="0"/>
               </a:spcAft>
               <a:buNone/>
-            </a:pPr>
-            <a:r>
-              <a:rPr sz="840" b="0" i="0" lang="en-US">
-                <a:solidFill>
-                  <a:srgbClr val="E4ECF7"/>
-                </a:solidFill>
-                <a:latin typeface="Calibri"/>
-              </a:rPr>
-              <a:t>Autonomous beacon acquisition in ≤ 0.8 s, beating ISRO's ≤ 2.0 s mandate by &gt;60%.</a:t>
+              <a:defRPr sz="750">
+                <a:solidFill>
+                  <a:srgbClr val="212B36"/>
+                </a:solidFill>
+              </a:defRPr>
+            </a:pPr>
+            <a:r>
+              <a:t>Autonomous acquisition in ≤ 0.8 s (SLA: ≤ 2.0 s); forward projection cuts pointing lag by up to 32%.</a:t>
             </a:r>
           </a:p>
         </p:txBody>
@@ -17692,14 +17613,13 @@
                 <a:spcPts val="0"/>
               </a:spcAft>
               <a:buNone/>
-            </a:pPr>
-            <a:r>
-              <a:rPr sz="1350" b="1" i="0" lang="en-US">
+              <a:defRPr sz="1100" b="1">
                 <a:solidFill>
                   <a:srgbClr val="0F2240"/>
                 </a:solidFill>
-                <a:latin typeface="Calibri"/>
-              </a:rPr>
+              </a:defRPr>
+            </a:pPr>
+            <a:r>
               <a:t>≤ 0.8 s</a:t>
             </a:r>
           </a:p>
@@ -17735,14 +17655,13 @@
                 <a:spcPts val="0"/>
               </a:spcAft>
               <a:buNone/>
-            </a:pPr>
-            <a:r>
-              <a:rPr sz="780" b="0" i="0" lang="en-US">
+              <a:defRPr sz="750">
                 <a:solidFill>
                   <a:srgbClr val="475569"/>
                 </a:solidFill>
-                <a:latin typeface="Calibri"/>
-              </a:rPr>
+              </a:defRPr>
+            </a:pPr>
+            <a:r>
               <a:t>SLA: ≤ 2 s</a:t>
             </a:r>
           </a:p>
@@ -17852,15 +17771,14 @@
                 <a:spcPts val="0"/>
               </a:spcAft>
               <a:buNone/>
-            </a:pPr>
-            <a:r>
-              <a:rPr sz="930" b="1" i="0" lang="en-US">
-                <a:solidFill>
-                  <a:srgbClr val="FFB35C"/>
-                </a:solidFill>
-                <a:latin typeface="Calibri"/>
-              </a:rPr>
-              <a:t>Sub-Pixel Precision</a:t>
+              <a:defRPr sz="850" b="1">
+                <a:solidFill>
+                  <a:srgbClr val="0F2240"/>
+                </a:solidFill>
+              </a:defRPr>
+            </a:pPr>
+            <a:r>
+              <a:t>Sub-Pixel Coarse Centroiding</a:t>
             </a:r>
           </a:p>
         </p:txBody>
@@ -17895,15 +17813,14 @@
                 <a:spcPts val="0"/>
               </a:spcAft>
               <a:buNone/>
-            </a:pPr>
-            <a:r>
-              <a:rPr sz="840" b="0" i="0" lang="en-US">
-                <a:solidFill>
-                  <a:srgbClr val="E4ECF7"/>
-                </a:solidFill>
-                <a:latin typeface="Calibri"/>
-              </a:rPr>
-              <a:t>Maintains continuous centroid lock with error ≤ 1.5 px nominal, ≤ 4.8 px under extreme noise.</a:t>
+              <a:defRPr sz="750">
+                <a:solidFill>
+                  <a:srgbClr val="212B36"/>
+                </a:solidFill>
+              </a:defRPr>
+            </a:pPr>
+            <a:r>
+              <a:t>Maintains lock with RMSE ≤ 1.5 px nominal; all evaluated test trials remained compliant with PS ≤ 10 px cone.</a:t>
             </a:r>
           </a:p>
         </p:txBody>
@@ -17971,15 +17888,14 @@
                 <a:spcPts val="0"/>
               </a:spcAft>
               <a:buNone/>
-            </a:pPr>
-            <a:r>
-              <a:rPr sz="1350" b="1" i="0" lang="en-US">
+              <a:defRPr sz="1100" b="1">
                 <a:solidFill>
                   <a:srgbClr val="0F2240"/>
                 </a:solidFill>
-                <a:latin typeface="Calibri"/>
-              </a:rPr>
-              <a:t>≤ 1.5 px</a:t>
+              </a:defRPr>
+            </a:pPr>
+            <a:r>
+              <a:t>&lt; 1.5 px</a:t>
             </a:r>
           </a:p>
         </p:txBody>
@@ -18014,15 +17930,14 @@
                 <a:spcPts val="0"/>
               </a:spcAft>
               <a:buNone/>
-            </a:pPr>
-            <a:r>
-              <a:rPr sz="780" b="0" i="0" lang="en-US">
+              <a:defRPr sz="750">
                 <a:solidFill>
                   <a:srgbClr val="475569"/>
                 </a:solidFill>
-                <a:latin typeface="Calibri"/>
-              </a:rPr>
-              <a:t>SLA: ≤ 10 px</a:t>
+              </a:defRPr>
+            </a:pPr>
+            <a:r>
+              <a:t>PS Cone: ≤ 10 px</a:t>
             </a:r>
           </a:p>
         </p:txBody>
@@ -18131,15 +18046,14 @@
                 <a:spcPts val="0"/>
               </a:spcAft>
               <a:buNone/>
-            </a:pPr>
-            <a:r>
-              <a:rPr sz="930" b="1" i="0" lang="en-US">
-                <a:solidFill>
-                  <a:srgbClr val="FFB35C"/>
-                </a:solidFill>
-                <a:latin typeface="Calibri"/>
-              </a:rPr>
-              <a:t>Automated ISRO Benchmark</a:t>
+              <a:defRPr sz="850" b="1">
+                <a:solidFill>
+                  <a:srgbClr val="0F2240"/>
+                </a:solidFill>
+              </a:defRPr>
+            </a:pPr>
+            <a:r>
+              <a:t>Empirical Benchmark Engine</a:t>
             </a:r>
           </a:p>
         </p:txBody>
@@ -18174,15 +18088,14 @@
                 <a:spcPts val="0"/>
               </a:spcAft>
               <a:buNone/>
-            </a:pPr>
-            <a:r>
-              <a:rPr sz="840" b="0" i="0" lang="en-US">
-                <a:solidFill>
-                  <a:srgbClr val="E4ECF7"/>
-                </a:solidFill>
-                <a:latin typeface="Calibri"/>
-              </a:rPr>
-              <a:t>Auto-exports timestamped CSV/PDF reports detailing RMSE, FPS, and lock retention rates.</a:t>
+              <a:defRPr sz="750">
+                <a:solidFill>
+                  <a:srgbClr val="212B36"/>
+                </a:solidFill>
+              </a:defRPr>
+            </a:pPr>
+            <a:r>
+              <a:t>Auto-exports timestamped CSV compliance audits; empirically verifies Hypotheses H1 (latency) &amp; H2 (reacquisition).</a:t>
             </a:r>
           </a:p>
         </p:txBody>
@@ -18250,15 +18163,14 @@
                 <a:spcPts val="0"/>
               </a:spcAft>
               <a:buNone/>
-            </a:pPr>
-            <a:r>
-              <a:rPr sz="1350" b="1" i="0" lang="en-US">
+              <a:defRPr sz="1100" b="1">
                 <a:solidFill>
                   <a:srgbClr val="0F2240"/>
                 </a:solidFill>
-                <a:latin typeface="Calibri"/>
-              </a:rPr>
-              <a:t>100%</a:t>
+              </a:defRPr>
+            </a:pPr>
+            <a:r>
+              <a:t>+97% / +32%</a:t>
             </a:r>
           </a:p>
         </p:txBody>
@@ -18293,15 +18205,14 @@
                 <a:spcPts val="0"/>
               </a:spcAft>
               <a:buNone/>
-            </a:pPr>
-            <a:r>
-              <a:rPr sz="780" b="0" i="0" lang="en-US">
+              <a:defRPr sz="750">
                 <a:solidFill>
                   <a:srgbClr val="475569"/>
                 </a:solidFill>
-                <a:latin typeface="Calibri"/>
-              </a:rPr>
-              <a:t>Automated compliance</a:t>
+              </a:defRPr>
+            </a:pPr>
+            <a:r>
+              <a:t>H1 &amp; H2 Empirical Gains</a:t>
             </a:r>
           </a:p>
         </p:txBody>
@@ -20221,15 +20132,14 @@
                 <a:spcPts val="0"/>
               </a:spcAft>
               <a:buNone/>
-            </a:pPr>
-            <a:r>
-              <a:rPr sz="1000" b="1" i="0" lang="en-US">
-                <a:solidFill>
-                  <a:srgbClr val="B35A00"/>
-                </a:solidFill>
-                <a:latin typeface="Calibri"/>
-              </a:rPr>
-              <a:t>Documented Engineering Deliverables</a:t>
+              <a:defRPr sz="919" b="1">
+                <a:solidFill>
+                  <a:srgbClr val="0F2240"/>
+                </a:solidFill>
+              </a:defRPr>
+            </a:pPr>
+            <a:r>
+              <a:t>Scope Boundary &amp; Engineering Deliverables</a:t>
             </a:r>
           </a:p>
         </p:txBody>
@@ -20266,12 +20176,12 @@
               <a:buNone/>
             </a:pPr>
             <a:r>
-              <a:rPr sz="800">
+              <a:rPr sz="760">
                 <a:solidFill>
                   <a:srgbClr val="212B36"/>
                 </a:solidFill>
               </a:rPr>
-              <a:t>1. docs/system_architecture_plan.md (System Blueprint)</a:t>
+              <a:t>1. Scope Boundary: Coarse PAT &amp; Reacquisition Stage (109.1 μrad/px). Downstream fine pointing (FSM, QPD, BER, link budget) handled at handover.</a:t>
             </a:r>
           </a:p>
           <a:p>
@@ -20281,12 +20191,12 @@
               </a:spcAft>
             </a:pPr>
             <a:r>
-              <a:rPr sz="800">
+              <a:rPr sz="760">
                 <a:solidFill>
                   <a:srgbClr val="212B36"/>
                 </a:solidFill>
               </a:rPr>
-              <a:t>2. academic_research/ (Literature Review &amp; Papers)</a:t>
+              <a:t>2. Scientific Engine: src/experiments/scientific_benchmark.py (Sweeps for SNR, Latency H1, Reacquisition H2, Maneuvers).</a:t>
             </a:r>
           </a:p>
           <a:p>
@@ -20296,12 +20206,12 @@
               </a:spcAft>
             </a:pPr>
             <a:r>
-              <a:rPr sz="800">
+              <a:rPr sz="760">
                 <a:solidFill>
                   <a:srgbClr val="212B36"/>
                 </a:solidFill>
               </a:rPr>
-              <a:t>3. distributed_demo/ (3-Node Networked Simulation)</a:t>
+              <a:t>3. Standalone Releases: Native macOS 61 MB DMG (arm64 Apple Silicon) + Windows 1-click CI/CD binaries.</a:t>
             </a:r>
           </a:p>
         </p:txBody>
